--- a/frontend/demo-assets/demo-export-high-sample.pptx
+++ b/frontend/demo-assets/demo-export-high-sample.pptx
@@ -1369,7 +1369,7 @@
                 <a:ea typeface="Yu Gothic" pitchFamily="34" charset="-122"/>
                 <a:cs typeface="Yu Gothic" pitchFamily="34" charset="-120"/>
               </a:rPr>
-              <a:t>2026/4/9 06:20 JST デモ利用者</a:t>
+              <a:t>2026/5/2 06:39 JST デモ利用者</a:t>
             </a:r>
             <a:endParaRPr lang="en-US" sz="1000" dirty="0"/>
           </a:p>
@@ -1409,7 +1409,7 @@
                 <a:ea typeface="Yu Gothic" pitchFamily="34" charset="-122"/>
                 <a:cs typeface="Yu Gothic" pitchFamily="34" charset="-120"/>
               </a:rPr>
-              <a:t>2026/4/9 06:50 JST 佐藤</a:t>
+              <a:t>2026/5/2 07:09 JST 佐藤</a:t>
             </a:r>
             <a:endParaRPr lang="en-US" sz="1000" dirty="0"/>
           </a:p>
@@ -1825,7 +1825,7 @@
                 <a:ea typeface="Yu Gothic" pitchFamily="34" charset="-122"/>
                 <a:cs typeface="Yu Gothic" pitchFamily="34" charset="-120"/>
               </a:rPr>
-              <a:t>2026/4/9 07:10 JST デモ利用者</a:t>
+              <a:t>2026/5/2 07:29 JST デモ利用者</a:t>
             </a:r>
             <a:endParaRPr lang="en-US" sz="1000" dirty="0"/>
           </a:p>
